--- a/PPTs/bak/Textbook Lecture_Slides_V3/Chapter_10_C_and_Assembly.pptx
+++ b/PPTs/bak/Textbook Lecture_Slides_V3/Chapter_10_C_and_Assembly.pptx
@@ -142,6 +142,59 @@
 </p:presentation>
 </file>
 
+<file path=ppt/revisionInfo.xml><?xml version="1.0" encoding="utf-8"?>
+<p1510:revInfo xmlns:a="http://schemas.openxmlformats.org/drawingml/2006/main" xmlns:r="http://schemas.openxmlformats.org/officeDocument/2006/relationships" xmlns:p1510="http://schemas.microsoft.com/office/powerpoint/2015/10/main">
+  <p1510:revLst>
+    <p1510:client id="{0F55FE83-ED6B-4BF0-9B40-EC23B852C17E}" v="1" dt="2025-09-29T01:23:26.636"/>
+  </p1510:revLst>
+</p1510:revInfo>
+</file>
+
+<file path=ppt/changesInfos/changesInfo1.xml><?xml version="1.0" encoding="utf-8"?>
+<pc:chgInfo xmlns:a="http://schemas.openxmlformats.org/drawingml/2006/main" xmlns:r="http://schemas.openxmlformats.org/officeDocument/2006/relationships" xmlns:ac="http://schemas.microsoft.com/office/drawing/2013/main/command" xmlns:pc="http://schemas.microsoft.com/office/powerpoint/2013/main/command">
+  <pc:docChgLst>
+    <pc:chgData name="Zonghua Gu" userId="9a7e1853e1951ef5" providerId="LiveId" clId="{CF1FAA12-072C-4ED5-BA76-0FFFAEFDB88A}"/>
+    <pc:docChg chg="modSld">
+      <pc:chgData name="Zonghua Gu" userId="9a7e1853e1951ef5" providerId="LiveId" clId="{CF1FAA12-072C-4ED5-BA76-0FFFAEFDB88A}" dt="2025-09-29T01:23:26.636" v="10"/>
+      <pc:docMkLst>
+        <pc:docMk/>
+      </pc:docMkLst>
+      <pc:sldChg chg="addSp modSp mod">
+        <pc:chgData name="Zonghua Gu" userId="9a7e1853e1951ef5" providerId="LiveId" clId="{CF1FAA12-072C-4ED5-BA76-0FFFAEFDB88A}" dt="2025-09-29T01:23:26.636" v="10"/>
+        <pc:sldMkLst>
+          <pc:docMk/>
+          <pc:sldMk cId="1683281344" sldId="256"/>
+        </pc:sldMkLst>
+        <pc:spChg chg="mod">
+          <ac:chgData name="Zonghua Gu" userId="9a7e1853e1951ef5" providerId="LiveId" clId="{CF1FAA12-072C-4ED5-BA76-0FFFAEFDB88A}" dt="2025-09-29T01:23:04.065" v="4" actId="20577"/>
+          <ac:spMkLst>
+            <pc:docMk/>
+            <pc:sldMk cId="1683281344" sldId="256"/>
+            <ac:spMk id="2" creationId="{00000000-0000-0000-0000-000000000000}"/>
+          </ac:spMkLst>
+        </pc:spChg>
+        <pc:spChg chg="mod">
+          <ac:chgData name="Zonghua Gu" userId="9a7e1853e1951ef5" providerId="LiveId" clId="{CF1FAA12-072C-4ED5-BA76-0FFFAEFDB88A}" dt="2025-09-29T01:23:09.064" v="9" actId="20577"/>
+          <ac:spMkLst>
+            <pc:docMk/>
+            <pc:sldMk cId="1683281344" sldId="256"/>
+            <ac:spMk id="3" creationId="{00000000-0000-0000-0000-000000000000}"/>
+          </ac:spMkLst>
+        </pc:spChg>
+        <pc:spChg chg="add mod">
+          <ac:chgData name="Zonghua Gu" userId="9a7e1853e1951ef5" providerId="LiveId" clId="{CF1FAA12-072C-4ED5-BA76-0FFFAEFDB88A}" dt="2025-09-29T01:23:26.636" v="10"/>
+          <ac:spMkLst>
+            <pc:docMk/>
+            <pc:sldMk cId="1683281344" sldId="256"/>
+            <ac:spMk id="7" creationId="{92669542-E761-9FCC-153E-76FF9A001325}"/>
+          </ac:spMkLst>
+        </pc:spChg>
+      </pc:sldChg>
+    </pc:docChg>
+  </pc:docChgLst>
+</pc:chgInfo>
+</file>
+
 <file path=ppt/notesMasters/notesMaster1.xml><?xml version="1.0" encoding="utf-8"?>
 <p:notesMaster xmlns:a="http://schemas.openxmlformats.org/drawingml/2006/main" xmlns:r="http://schemas.openxmlformats.org/officeDocument/2006/relationships" xmlns:p="http://schemas.openxmlformats.org/presentationml/2006/main">
   <p:cSld>
@@ -225,7 +278,7 @@
             <a:fld id="{75FD438B-6DDE-4FAA-9652-4082F72F61A0}" type="datetimeFigureOut">
               <a:rPr lang="en-US" smtClean="0"/>
               <a:pPr/>
-              <a:t>2/29/20</a:t>
+              <a:t>9/28/2025</a:t>
             </a:fld>
             <a:endParaRPr lang="en-US"/>
           </a:p>
@@ -636,7 +689,7 @@
             <a:fld id="{F927073D-A961-4AD8-9080-FB272CDA6A54}" type="datetime1">
               <a:rPr lang="en-US" smtClean="0"/>
               <a:pPr eaLnBrk="1" latinLnBrk="0" hangingPunct="1"/>
-              <a:t>2/29/20</a:t>
+              <a:t>9/28/2025</a:t>
             </a:fld>
             <a:endParaRPr lang="en-US" sz="1600" dirty="0"/>
           </a:p>
@@ -997,7 +1050,7 @@
             <a:fld id="{A17EC4B8-B8BF-4757-8E5C-CA9B2A7DB263}" type="datetime1">
               <a:rPr lang="en-US" smtClean="0"/>
               <a:pPr eaLnBrk="1" latinLnBrk="0" hangingPunct="1"/>
-              <a:t>2/29/20</a:t>
+              <a:t>9/28/2025</a:t>
             </a:fld>
             <a:endParaRPr lang="en-US"/>
           </a:p>
@@ -1174,7 +1227,7 @@
             <a:fld id="{04E18119-E51A-4BDA-9B6A-583896360E66}" type="datetime1">
               <a:rPr lang="en-US" smtClean="0"/>
               <a:pPr eaLnBrk="1" latinLnBrk="0" hangingPunct="1"/>
-              <a:t>2/29/20</a:t>
+              <a:t>9/28/2025</a:t>
             </a:fld>
             <a:endParaRPr lang="en-US"/>
           </a:p>
@@ -1411,7 +1464,7 @@
             <a:fld id="{C9574503-4C7F-461C-B288-4B70C1AB58E2}" type="datetime1">
               <a:rPr lang="en-US" smtClean="0"/>
               <a:pPr eaLnBrk="1" latinLnBrk="0" hangingPunct="1"/>
-              <a:t>2/29/20</a:t>
+              <a:t>9/28/2025</a:t>
             </a:fld>
             <a:endParaRPr lang="en-US" dirty="0"/>
           </a:p>
@@ -1682,7 +1735,7 @@
             <a:fld id="{AED033FB-53CF-49FD-A9E8-4AF27E297FC1}" type="datetime1">
               <a:rPr lang="en-US" smtClean="0"/>
               <a:pPr eaLnBrk="1" latinLnBrk="0" hangingPunct="1"/>
-              <a:t>2/29/20</a:t>
+              <a:t>9/28/2025</a:t>
             </a:fld>
             <a:endParaRPr lang="en-US" dirty="0"/>
           </a:p>
@@ -1904,7 +1957,7 @@
             <a:fld id="{9F1087F5-46AD-46C0-8020-B53D4780B99A}" type="datetime1">
               <a:rPr lang="en-US" smtClean="0"/>
               <a:pPr eaLnBrk="1" latinLnBrk="0" hangingPunct="1"/>
-              <a:t>2/29/20</a:t>
+              <a:t>9/28/2025</a:t>
             </a:fld>
             <a:endParaRPr lang="en-US"/>
           </a:p>
@@ -2258,7 +2311,7 @@
             <a:fld id="{9B043304-DACD-4B87-9FDE-0B0797F37FA9}" type="datetime1">
               <a:rPr lang="en-US" smtClean="0"/>
               <a:pPr eaLnBrk="1" latinLnBrk="0" hangingPunct="1"/>
-              <a:t>2/29/20</a:t>
+              <a:t>9/28/2025</a:t>
             </a:fld>
             <a:endParaRPr lang="en-US"/>
           </a:p>
@@ -2492,7 +2545,7 @@
             <a:fld id="{D90E37B9-3793-4B87-A2E0-459E821E51C6}" type="datetime1">
               <a:rPr lang="en-US" smtClean="0"/>
               <a:pPr eaLnBrk="1" latinLnBrk="0" hangingPunct="1"/>
-              <a:t>2/29/20</a:t>
+              <a:t>9/28/2025</a:t>
             </a:fld>
             <a:endParaRPr lang="en-US"/>
           </a:p>
@@ -2635,7 +2688,7 @@
             <a:fld id="{6E23AAED-05CF-4E7B-A294-626B0C92F1FA}" type="datetime1">
               <a:rPr lang="en-US" smtClean="0"/>
               <a:pPr eaLnBrk="1" latinLnBrk="0" hangingPunct="1"/>
-              <a:t>2/29/20</a:t>
+              <a:t>9/28/2025</a:t>
             </a:fld>
             <a:endParaRPr lang="en-US"/>
           </a:p>
@@ -2914,7 +2967,7 @@
             <a:fld id="{616BBE3C-8579-4789-B00A-44BA01763C46}" type="datetime1">
               <a:rPr lang="en-US" smtClean="0"/>
               <a:pPr eaLnBrk="1" latinLnBrk="0" hangingPunct="1"/>
-              <a:t>2/29/20</a:t>
+              <a:t>9/28/2025</a:t>
             </a:fld>
             <a:endParaRPr lang="en-US"/>
           </a:p>
@@ -3323,7 +3376,7 @@
             <a:fld id="{5B27ABCC-E327-4FFC-BFEF-D6DB5D4BE908}" type="datetime1">
               <a:rPr lang="en-US" smtClean="0"/>
               <a:pPr eaLnBrk="1" latinLnBrk="0" hangingPunct="1"/>
-              <a:t>2/29/20</a:t>
+              <a:t>9/28/2025</a:t>
             </a:fld>
             <a:endParaRPr lang="en-US"/>
           </a:p>
@@ -3662,7 +3715,7 @@
             <a:fld id="{8E06CF98-5EC5-4322-B129-26BE8EBDE603}" type="datetime1">
               <a:rPr lang="en-US" smtClean="0"/>
               <a:pPr eaLnBrk="1" latinLnBrk="0" hangingPunct="1"/>
-              <a:t>2/29/20</a:t>
+              <a:t>9/28/2025</a:t>
             </a:fld>
             <a:endParaRPr lang="en-US" sz="1400" dirty="0">
               <a:solidFill>
@@ -4228,21 +4281,7 @@
           <a:p>
             <a:r>
               <a:rPr lang="en-US" sz="2000" dirty="0"/>
-              <a:t>Dr. Yifeng Zhu</a:t>
-            </a:r>
-            <a:br>
-              <a:rPr lang="en-US" sz="2000" dirty="0"/>
-            </a:br>
-            <a:r>
-              <a:rPr lang="en-US" sz="2000" dirty="0"/>
-              <a:t>Electrical and Computer Engineering</a:t>
-            </a:r>
-            <a:br>
-              <a:rPr lang="en-US" sz="2000" dirty="0"/>
-            </a:br>
-            <a:r>
-              <a:rPr lang="en-US" sz="2000" dirty="0"/>
-              <a:t>University of Maine</a:t>
+              <a:t>Z. Gu</a:t>
             </a:r>
           </a:p>
         </p:txBody>
@@ -4264,7 +4303,7 @@
           <a:p>
             <a:r>
               <a:rPr lang="en-US" dirty="0"/>
-              <a:t>Spring 2020</a:t>
+              <a:t>Fall 2025</a:t>
             </a:r>
           </a:p>
         </p:txBody>
@@ -4368,6 +4407,129 @@
               <a:t>1</a:t>
             </a:fld>
             <a:endParaRPr kumimoji="0" lang="en-US" dirty="0"/>
+          </a:p>
+        </p:txBody>
+      </p:sp>
+      <p:sp>
+        <p:nvSpPr>
+          <p:cNvPr id="7" name="TextBox 6">
+            <a:extLst>
+              <a:ext uri="{FF2B5EF4-FFF2-40B4-BE49-F238E27FC236}">
+                <a16:creationId xmlns:a16="http://schemas.microsoft.com/office/drawing/2014/main" id="{92669542-E761-9FCC-153E-76FF9A001325}"/>
+              </a:ext>
+            </a:extLst>
+          </p:cNvPr>
+          <p:cNvSpPr txBox="1"/>
+          <p:nvPr/>
+        </p:nvSpPr>
+        <p:spPr>
+          <a:xfrm>
+            <a:off x="709138" y="6259175"/>
+            <a:ext cx="7725724" cy="461665"/>
+          </a:xfrm>
+          <a:prstGeom prst="rect">
+            <a:avLst/>
+          </a:prstGeom>
+          <a:solidFill>
+            <a:sysClr val="window" lastClr="FFFFFF"/>
+          </a:solidFill>
+          <a:ln w="9525" cap="flat" cmpd="sng" algn="ctr">
+            <a:solidFill>
+              <a:srgbClr val="4BACC6"/>
+            </a:solidFill>
+            <a:prstDash val="solid"/>
+          </a:ln>
+          <a:effectLst/>
+        </p:spPr>
+        <p:txBody>
+          <a:bodyPr wrap="square" rtlCol="0">
+            <a:spAutoFit/>
+          </a:bodyPr>
+          <a:lstStyle/>
+          <a:p>
+            <a:pPr marL="0" marR="0" lvl="0" indent="0" defTabSz="914400" eaLnBrk="1" fontAlgn="auto" latinLnBrk="0" hangingPunct="1">
+              <a:lnSpc>
+                <a:spcPct val="100000"/>
+              </a:lnSpc>
+              <a:spcBef>
+                <a:spcPts val="0"/>
+              </a:spcBef>
+              <a:spcAft>
+                <a:spcPts val="0"/>
+              </a:spcAft>
+              <a:buClrTx/>
+              <a:buSzTx/>
+              <a:buFontTx/>
+              <a:buNone/>
+              <a:tabLst/>
+              <a:defRPr/>
+            </a:pPr>
+            <a:r>
+              <a:rPr kumimoji="0" lang="en-US" altLang="zh-CN" sz="1200" b="0" i="0" u="none" strike="noStrike" kern="0" cap="none" spc="0" normalizeH="0" baseline="0" noProof="0" dirty="0">
+                <a:ln>
+                  <a:noFill/>
+                </a:ln>
+                <a:solidFill>
+                  <a:prstClr val="black"/>
+                </a:solidFill>
+                <a:effectLst/>
+                <a:uLnTx/>
+                <a:uFillTx/>
+                <a:latin typeface="Gill Sans Light"/>
+                <a:ea typeface="华文新魏" panose="02010800040101010101" pitchFamily="2" charset="-122"/>
+                <a:cs typeface="+mn-cs"/>
+              </a:rPr>
+              <a:t>Acknowledgement: Lecture slides based on Embedded Systems with ARM Cortex-M Microcontrollers in Assembly Language and C, University of Maine </a:t>
+            </a:r>
+            <a:r>
+              <a:rPr kumimoji="0" lang="en-US" altLang="zh-CN" sz="1200" b="0" i="0" u="none" strike="noStrike" kern="0" cap="none" spc="0" normalizeH="0" baseline="0" noProof="0" dirty="0">
+                <a:ln>
+                  <a:noFill/>
+                </a:ln>
+                <a:solidFill>
+                  <a:prstClr val="black"/>
+                </a:solidFill>
+                <a:effectLst/>
+                <a:uLnTx/>
+                <a:uFillTx/>
+                <a:latin typeface="Gill Sans Light"/>
+                <a:ea typeface="华文新魏" panose="02010800040101010101" pitchFamily="2" charset="-122"/>
+                <a:cs typeface="+mn-cs"/>
+                <a:hlinkClick r:id="rId2"/>
+              </a:rPr>
+              <a:t>https://web.eece.maine.edu/~zhu/book/</a:t>
+            </a:r>
+            <a:r>
+              <a:rPr kumimoji="0" lang="en-US" altLang="zh-CN" sz="1200" b="0" i="0" u="none" strike="noStrike" kern="0" cap="none" spc="0" normalizeH="0" baseline="0" noProof="0" dirty="0">
+                <a:ln>
+                  <a:noFill/>
+                </a:ln>
+                <a:solidFill>
+                  <a:prstClr val="black"/>
+                </a:solidFill>
+                <a:effectLst/>
+                <a:uLnTx/>
+                <a:uFillTx/>
+                <a:latin typeface="Gill Sans Light"/>
+                <a:ea typeface="华文新魏" panose="02010800040101010101" pitchFamily="2" charset="-122"/>
+                <a:cs typeface="+mn-cs"/>
+              </a:rPr>
+              <a:t> </a:t>
+            </a:r>
+            <a:endParaRPr kumimoji="0" lang="en-SE" sz="1200" b="0" i="0" u="none" strike="noStrike" kern="0" cap="none" spc="0" normalizeH="0" baseline="0" noProof="0" dirty="0">
+              <a:ln>
+                <a:noFill/>
+              </a:ln>
+              <a:solidFill>
+                <a:prstClr val="black"/>
+              </a:solidFill>
+              <a:effectLst/>
+              <a:uLnTx/>
+              <a:uFillTx/>
+              <a:latin typeface="Gill Sans Light"/>
+              <a:ea typeface="+mn-ea"/>
+              <a:cs typeface="+mn-cs"/>
+            </a:endParaRPr>
           </a:p>
         </p:txBody>
       </p:sp>
